--- a/Report And PPT/Aastha_2210991129_PPT.pptx
+++ b/Report And PPT/Aastha_2210991129_PPT.pptx
@@ -17,9 +17,9 @@
     <p:sldId id="270" r:id="rId8"/>
     <p:sldId id="271" r:id="rId9"/>
     <p:sldId id="272" r:id="rId10"/>
-    <p:sldId id="273" r:id="rId11"/>
-    <p:sldId id="274" r:id="rId12"/>
-    <p:sldId id="277" r:id="rId13"/>
+    <p:sldId id="277" r:id="rId11"/>
+    <p:sldId id="273" r:id="rId12"/>
+    <p:sldId id="274" r:id="rId13"/>
     <p:sldId id="275" r:id="rId14"/>
     <p:sldId id="278" r:id="rId15"/>
     <p:sldId id="268" r:id="rId16"/>
@@ -3814,7 +3814,7 @@
           <p:nvPr>
             <p:extLst>
               <p:ext uri="{D42A27DB-BD31-4B8C-83A1-F6EECF244321}">
-                <p14:modId xmlns:p14="http://schemas.microsoft.com/office/powerpoint/2010/main" val="3809639262"/>
+                <p14:modId xmlns:p14="http://schemas.microsoft.com/office/powerpoint/2010/main" val="1716872538"/>
               </p:ext>
             </p:extLst>
           </p:nvPr>
@@ -4075,9 +4075,10 @@
                         <a:rPr lang="en-US" sz="2000" dirty="0">
                           <a:effectLst/>
                           <a:latin typeface="Times New Roman" panose="02020603050405020304" pitchFamily="18" charset="0"/>
+                          <a:ea typeface="SimSun" panose="02010600030101010101" pitchFamily="2" charset="-122"/>
                           <a:cs typeface="Times New Roman" panose="02020603050405020304" pitchFamily="18" charset="0"/>
                         </a:rPr>
-                        <a:t>16</a:t>
+                        <a:t>77</a:t>
                       </a:r>
                       <a:endParaRPr lang="en-IN" sz="2000" dirty="0">
                         <a:effectLst/>
@@ -5670,10 +5671,6 @@
           </a:bodyPr>
           <a:lstStyle/>
           <a:p>
-            <a:pPr marL="342900" indent="-342900">
-              <a:buFont typeface="Arial" panose="020B0604020202020204" pitchFamily="34" charset="0"/>
-              <a:buChar char="•"/>
-            </a:pPr>
             <a:r>
               <a:rPr lang="en-US" sz="2000" dirty="0">
                 <a:latin typeface="Times New Roman" panose="02020603050405020304" pitchFamily="18" charset="0"/>
@@ -5867,6 +5864,9 @@
           <a:lstStyle/>
           <a:p>
             <a:pPr marL="342900" indent="-342900">
+              <a:lnSpc>
+                <a:spcPct val="150000"/>
+              </a:lnSpc>
               <a:buFont typeface="Arial" panose="020B0604020202020204" pitchFamily="34" charset="0"/>
               <a:buChar char="•"/>
             </a:pPr>
@@ -5880,6 +5880,9 @@
           </a:p>
           <a:p>
             <a:pPr marL="342900" indent="-342900">
+              <a:lnSpc>
+                <a:spcPct val="150000"/>
+              </a:lnSpc>
               <a:buFont typeface="Arial" panose="020B0604020202020204" pitchFamily="34" charset="0"/>
               <a:buChar char="•"/>
             </a:pPr>
@@ -5893,6 +5896,9 @@
           </a:p>
           <a:p>
             <a:pPr marL="342900" indent="-342900">
+              <a:lnSpc>
+                <a:spcPct val="150000"/>
+              </a:lnSpc>
               <a:buFont typeface="Arial" panose="020B0604020202020204" pitchFamily="34" charset="0"/>
               <a:buChar char="•"/>
             </a:pPr>
@@ -5906,6 +5912,9 @@
           </a:p>
           <a:p>
             <a:pPr marL="342900" indent="-342900">
+              <a:lnSpc>
+                <a:spcPct val="150000"/>
+              </a:lnSpc>
               <a:buFont typeface="Arial" panose="020B0604020202020204" pitchFamily="34" charset="0"/>
               <a:buChar char="•"/>
             </a:pPr>
@@ -6039,13 +6048,13 @@
         </p:nvSpPr>
         <p:spPr>
           <a:xfrm>
-            <a:off x="353568" y="1328928"/>
+            <a:off x="365760" y="1804416"/>
             <a:ext cx="5486040" cy="3011424"/>
           </a:xfrm>
         </p:spPr>
         <p:txBody>
           <a:bodyPr>
-            <a:normAutofit/>
+            <a:noAutofit/>
           </a:bodyPr>
           <a:lstStyle/>
           <a:p>
@@ -6065,12 +6074,82 @@
             </a:r>
           </a:p>
           <a:p>
+            <a:endParaRPr lang="en-IN" sz="2000" dirty="0">
+              <a:latin typeface="Times New Roman" panose="02020603050405020304" pitchFamily="18" charset="0"/>
+              <a:cs typeface="Times New Roman" panose="02020603050405020304" pitchFamily="18" charset="0"/>
+            </a:endParaRPr>
+          </a:p>
+          <a:p>
             <a:r>
               <a:rPr lang="en-IN" sz="2000" b="1" dirty="0">
                 <a:latin typeface="Times New Roman" panose="02020603050405020304" pitchFamily="18" charset="0"/>
                 <a:cs typeface="Times New Roman" panose="02020603050405020304" pitchFamily="18" charset="0"/>
               </a:rPr>
               <a:t>Classes:</a:t>
+            </a:r>
+          </a:p>
+          <a:p>
+            <a:pPr marL="285750" lvl="1" indent="-285750">
+              <a:lnSpc>
+                <a:spcPct val="160000"/>
+              </a:lnSpc>
+              <a:buFont typeface="Arial" panose="020B0604020202020204" pitchFamily="34" charset="0"/>
+              <a:buChar char="•"/>
+            </a:pPr>
+            <a:r>
+              <a:rPr lang="en-IN" sz="1600" dirty="0">
+                <a:latin typeface="Times New Roman" panose="02020603050405020304" pitchFamily="18" charset="0"/>
+                <a:cs typeface="Times New Roman" panose="02020603050405020304" pitchFamily="18" charset="0"/>
+              </a:rPr>
+              <a:t>Non-Demented</a:t>
+            </a:r>
+          </a:p>
+          <a:p>
+            <a:pPr marL="285750" lvl="1" indent="-285750">
+              <a:lnSpc>
+                <a:spcPct val="160000"/>
+              </a:lnSpc>
+              <a:buFont typeface="Arial" panose="020B0604020202020204" pitchFamily="34" charset="0"/>
+              <a:buChar char="•"/>
+            </a:pPr>
+            <a:r>
+              <a:rPr lang="en-IN" sz="1600" dirty="0">
+                <a:latin typeface="Times New Roman" panose="02020603050405020304" pitchFamily="18" charset="0"/>
+                <a:cs typeface="Times New Roman" panose="02020603050405020304" pitchFamily="18" charset="0"/>
+              </a:rPr>
+              <a:t>Very Mild Demented</a:t>
+            </a:r>
+          </a:p>
+          <a:p>
+            <a:pPr marL="285750" lvl="1" indent="-285750">
+              <a:lnSpc>
+                <a:spcPct val="160000"/>
+              </a:lnSpc>
+              <a:buFont typeface="Arial" panose="020B0604020202020204" pitchFamily="34" charset="0"/>
+              <a:buChar char="•"/>
+            </a:pPr>
+            <a:r>
+              <a:rPr lang="en-IN" sz="1600" dirty="0">
+                <a:latin typeface="Times New Roman" panose="02020603050405020304" pitchFamily="18" charset="0"/>
+                <a:cs typeface="Times New Roman" panose="02020603050405020304" pitchFamily="18" charset="0"/>
+              </a:rPr>
+              <a:t>Mild Demented</a:t>
+            </a:r>
+          </a:p>
+          <a:p>
+            <a:pPr marL="285750" lvl="1" indent="-285750">
+              <a:lnSpc>
+                <a:spcPct val="160000"/>
+              </a:lnSpc>
+              <a:buFont typeface="Arial" panose="020B0604020202020204" pitchFamily="34" charset="0"/>
+              <a:buChar char="•"/>
+            </a:pPr>
+            <a:r>
+              <a:rPr lang="en-IN" sz="1600" dirty="0">
+                <a:latin typeface="Times New Roman" panose="02020603050405020304" pitchFamily="18" charset="0"/>
+                <a:cs typeface="Times New Roman" panose="02020603050405020304" pitchFamily="18" charset="0"/>
+              </a:rPr>
+              <a:t>Moderate Demented</a:t>
             </a:r>
           </a:p>
           <a:p>
@@ -6078,16 +6157,44 @@
               <a:buFont typeface="Arial" panose="020B0604020202020204" pitchFamily="34" charset="0"/>
               <a:buChar char="•"/>
             </a:pPr>
-            <a:r>
-              <a:rPr lang="en-IN" sz="1600" dirty="0">
-                <a:latin typeface="Times New Roman" panose="02020603050405020304" pitchFamily="18" charset="0"/>
-                <a:cs typeface="Times New Roman" panose="02020603050405020304" pitchFamily="18" charset="0"/>
-              </a:rPr>
-              <a:t>Non-Demented</a:t>
+            <a:endParaRPr lang="en-IN" sz="1600" dirty="0">
+              <a:latin typeface="Times New Roman" panose="02020603050405020304" pitchFamily="18" charset="0"/>
+              <a:cs typeface="Times New Roman" panose="02020603050405020304" pitchFamily="18" charset="0"/>
+            </a:endParaRPr>
+          </a:p>
+          <a:p>
+            <a:pPr>
+              <a:lnSpc>
+                <a:spcPct val="170000"/>
+              </a:lnSpc>
+            </a:pPr>
+            <a:r>
+              <a:rPr lang="en-IN" sz="2000" b="1" dirty="0">
+                <a:latin typeface="Times New Roman" panose="02020603050405020304" pitchFamily="18" charset="0"/>
+                <a:cs typeface="Times New Roman" panose="02020603050405020304" pitchFamily="18" charset="0"/>
+              </a:rPr>
+              <a:t>Data </a:t>
+            </a:r>
+            <a:r>
+              <a:rPr lang="en-IN" sz="2000" b="1" dirty="0" err="1">
+                <a:latin typeface="Times New Roman" panose="02020603050405020304" pitchFamily="18" charset="0"/>
+                <a:cs typeface="Times New Roman" panose="02020603050405020304" pitchFamily="18" charset="0"/>
+              </a:rPr>
+              <a:t>preprocessing</a:t>
+            </a:r>
+            <a:r>
+              <a:rPr lang="en-IN" sz="2000" b="1" dirty="0">
+                <a:latin typeface="Times New Roman" panose="02020603050405020304" pitchFamily="18" charset="0"/>
+                <a:cs typeface="Times New Roman" panose="02020603050405020304" pitchFamily="18" charset="0"/>
+              </a:rPr>
+              <a:t>:</a:t>
             </a:r>
           </a:p>
           <a:p>
             <a:pPr marL="285750" lvl="1" indent="-285750">
+              <a:lnSpc>
+                <a:spcPct val="170000"/>
+              </a:lnSpc>
               <a:buFont typeface="Arial" panose="020B0604020202020204" pitchFamily="34" charset="0"/>
               <a:buChar char="•"/>
             </a:pPr>
@@ -6096,11 +6203,14 @@
                 <a:latin typeface="Times New Roman" panose="02020603050405020304" pitchFamily="18" charset="0"/>
                 <a:cs typeface="Times New Roman" panose="02020603050405020304" pitchFamily="18" charset="0"/>
               </a:rPr>
-              <a:t>Very Mild Demented</a:t>
+              <a:t>Resizing images</a:t>
             </a:r>
           </a:p>
           <a:p>
             <a:pPr marL="285750" lvl="1" indent="-285750">
+              <a:lnSpc>
+                <a:spcPct val="170000"/>
+              </a:lnSpc>
               <a:buFont typeface="Arial" panose="020B0604020202020204" pitchFamily="34" charset="0"/>
               <a:buChar char="•"/>
             </a:pPr>
@@ -6109,73 +6219,14 @@
                 <a:latin typeface="Times New Roman" panose="02020603050405020304" pitchFamily="18" charset="0"/>
                 <a:cs typeface="Times New Roman" panose="02020603050405020304" pitchFamily="18" charset="0"/>
               </a:rPr>
-              <a:t>Mild Demented</a:t>
+              <a:t>Normalization</a:t>
             </a:r>
           </a:p>
           <a:p>
             <a:pPr marL="285750" lvl="1" indent="-285750">
-              <a:buFont typeface="Arial" panose="020B0604020202020204" pitchFamily="34" charset="0"/>
-              <a:buChar char="•"/>
-            </a:pPr>
-            <a:r>
-              <a:rPr lang="en-IN" sz="1600" dirty="0">
-                <a:latin typeface="Times New Roman" panose="02020603050405020304" pitchFamily="18" charset="0"/>
-                <a:cs typeface="Times New Roman" panose="02020603050405020304" pitchFamily="18" charset="0"/>
-              </a:rPr>
-              <a:t>Moderate Demented</a:t>
-            </a:r>
-          </a:p>
-          <a:p>
-            <a:r>
-              <a:rPr lang="en-IN" sz="2000" b="1" dirty="0">
-                <a:latin typeface="Times New Roman" panose="02020603050405020304" pitchFamily="18" charset="0"/>
-                <a:cs typeface="Times New Roman" panose="02020603050405020304" pitchFamily="18" charset="0"/>
-              </a:rPr>
-              <a:t>Data </a:t>
-            </a:r>
-            <a:r>
-              <a:rPr lang="en-IN" sz="2000" b="1" dirty="0" err="1">
-                <a:latin typeface="Times New Roman" panose="02020603050405020304" pitchFamily="18" charset="0"/>
-                <a:cs typeface="Times New Roman" panose="02020603050405020304" pitchFamily="18" charset="0"/>
-              </a:rPr>
-              <a:t>preprocessing</a:t>
-            </a:r>
-            <a:r>
-              <a:rPr lang="en-IN" sz="2000" b="1" dirty="0">
-                <a:latin typeface="Times New Roman" panose="02020603050405020304" pitchFamily="18" charset="0"/>
-                <a:cs typeface="Times New Roman" panose="02020603050405020304" pitchFamily="18" charset="0"/>
-              </a:rPr>
-              <a:t>:</a:t>
-            </a:r>
-          </a:p>
-          <a:p>
-            <a:pPr marL="285750" lvl="1" indent="-285750">
-              <a:buFont typeface="Arial" panose="020B0604020202020204" pitchFamily="34" charset="0"/>
-              <a:buChar char="•"/>
-            </a:pPr>
-            <a:r>
-              <a:rPr lang="en-IN" sz="1600" dirty="0">
-                <a:latin typeface="Times New Roman" panose="02020603050405020304" pitchFamily="18" charset="0"/>
-                <a:cs typeface="Times New Roman" panose="02020603050405020304" pitchFamily="18" charset="0"/>
-              </a:rPr>
-              <a:t>Resizing images</a:t>
-            </a:r>
-          </a:p>
-          <a:p>
-            <a:pPr marL="285750" lvl="1" indent="-285750">
-              <a:buFont typeface="Arial" panose="020B0604020202020204" pitchFamily="34" charset="0"/>
-              <a:buChar char="•"/>
-            </a:pPr>
-            <a:r>
-              <a:rPr lang="en-IN" sz="1600" dirty="0">
-                <a:latin typeface="Times New Roman" panose="02020603050405020304" pitchFamily="18" charset="0"/>
-                <a:cs typeface="Times New Roman" panose="02020603050405020304" pitchFamily="18" charset="0"/>
-              </a:rPr>
-              <a:t>Normalization</a:t>
-            </a:r>
-          </a:p>
-          <a:p>
-            <a:pPr marL="285750" lvl="1" indent="-285750">
+              <a:lnSpc>
+                <a:spcPct val="170000"/>
+              </a:lnSpc>
               <a:buFont typeface="Arial" panose="020B0604020202020204" pitchFamily="34" charset="0"/>
               <a:buChar char="•"/>
             </a:pPr>
@@ -6315,6 +6366,11 @@
           </a:bodyPr>
           <a:lstStyle/>
           <a:p>
+            <a:pPr>
+              <a:lnSpc>
+                <a:spcPct val="150000"/>
+              </a:lnSpc>
+            </a:pPr>
             <a:r>
               <a:rPr lang="en-IN" sz="2000" dirty="0">
                 <a:latin typeface="Times New Roman" panose="02020603050405020304" pitchFamily="18" charset="0"/>
@@ -6338,6 +6394,11 @@
             </a:r>
           </a:p>
           <a:p>
+            <a:pPr>
+              <a:lnSpc>
+                <a:spcPct val="150000"/>
+              </a:lnSpc>
+            </a:pPr>
             <a:r>
               <a:rPr lang="en-IN" sz="2000" dirty="0">
                 <a:latin typeface="Times New Roman" panose="02020603050405020304" pitchFamily="18" charset="0"/>
@@ -6348,6 +6409,9 @@
           </a:p>
           <a:p>
             <a:pPr marL="342900" lvl="1" indent="-342900">
+              <a:lnSpc>
+                <a:spcPct val="150000"/>
+              </a:lnSpc>
               <a:buFont typeface="Arial" panose="020B0604020202020204" pitchFamily="34" charset="0"/>
               <a:buChar char="•"/>
             </a:pPr>
@@ -6361,6 +6425,9 @@
           </a:p>
           <a:p>
             <a:pPr marL="342900" lvl="1" indent="-342900">
+              <a:lnSpc>
+                <a:spcPct val="150000"/>
+              </a:lnSpc>
               <a:buFont typeface="Arial" panose="020B0604020202020204" pitchFamily="34" charset="0"/>
               <a:buChar char="•"/>
             </a:pPr>
@@ -6374,6 +6441,9 @@
           </a:p>
           <a:p>
             <a:pPr marL="342900" lvl="1" indent="-342900">
+              <a:lnSpc>
+                <a:spcPct val="150000"/>
+              </a:lnSpc>
               <a:buFont typeface="Arial" panose="020B0604020202020204" pitchFamily="34" charset="0"/>
               <a:buChar char="•"/>
             </a:pPr>
@@ -6386,6 +6456,11 @@
             </a:r>
           </a:p>
           <a:p>
+            <a:pPr>
+              <a:lnSpc>
+                <a:spcPct val="150000"/>
+              </a:lnSpc>
+            </a:pPr>
             <a:r>
               <a:rPr lang="en-IN" sz="2000" dirty="0">
                 <a:latin typeface="Times New Roman" panose="02020603050405020304" pitchFamily="18" charset="0"/>
@@ -6478,6 +6553,545 @@
           <p:cNvPr id="2" name="Title 1">
             <a:extLst>
               <a:ext uri="{FF2B5EF4-FFF2-40B4-BE49-F238E27FC236}">
+                <a16:creationId xmlns:a16="http://schemas.microsoft.com/office/drawing/2014/main" id="{8C464057-151F-46CF-AF69-626B8FA7F150}"/>
+              </a:ext>
+            </a:extLst>
+          </p:cNvPr>
+          <p:cNvSpPr>
+            <a:spLocks noGrp="1"/>
+          </p:cNvSpPr>
+          <p:nvPr>
+            <p:ph type="title"/>
+          </p:nvPr>
+        </p:nvSpPr>
+        <p:spPr/>
+        <p:txBody>
+          <a:bodyPr/>
+          <a:lstStyle/>
+          <a:p>
+            <a:pPr algn="ctr"/>
+            <a:r>
+              <a:rPr lang="en-IN" sz="3200" dirty="0">
+                <a:latin typeface="Times New Roman" panose="02020603050405020304" pitchFamily="18" charset="0"/>
+                <a:cs typeface="Times New Roman" panose="02020603050405020304" pitchFamily="18" charset="0"/>
+              </a:rPr>
+              <a:t>Literature Review</a:t>
+            </a:r>
+          </a:p>
+        </p:txBody>
+      </p:sp>
+      <p:sp>
+        <p:nvSpPr>
+          <p:cNvPr id="3" name="Text Placeholder 2">
+            <a:extLst>
+              <a:ext uri="{FF2B5EF4-FFF2-40B4-BE49-F238E27FC236}">
+                <a16:creationId xmlns:a16="http://schemas.microsoft.com/office/drawing/2014/main" id="{C3BEA711-0EDE-4C19-8651-4B28D2029347}"/>
+              </a:ext>
+            </a:extLst>
+          </p:cNvPr>
+          <p:cNvSpPr>
+            <a:spLocks noGrp="1"/>
+          </p:cNvSpPr>
+          <p:nvPr>
+            <p:ph type="body"/>
+          </p:nvPr>
+        </p:nvSpPr>
+        <p:spPr>
+          <a:xfrm>
+            <a:off x="163200" y="1380418"/>
+            <a:ext cx="4015800" cy="2772134"/>
+          </a:xfrm>
+        </p:spPr>
+        <p:txBody>
+          <a:bodyPr>
+            <a:normAutofit/>
+          </a:bodyPr>
+          <a:lstStyle/>
+          <a:p>
+            <a:r>
+              <a:rPr lang="en-US" sz="2000" b="1" dirty="0">
+                <a:latin typeface="Times New Roman" panose="02020603050405020304" pitchFamily="18" charset="0"/>
+                <a:cs typeface="Times New Roman" panose="02020603050405020304" pitchFamily="18" charset="0"/>
+              </a:rPr>
+              <a:t> Key Insights</a:t>
+            </a:r>
+          </a:p>
+          <a:p>
+            <a:pPr marL="285750" lvl="1" indent="-285750">
+              <a:buFont typeface="Arial" panose="020B0604020202020204" pitchFamily="34" charset="0"/>
+              <a:buChar char="•"/>
+            </a:pPr>
+            <a:r>
+              <a:rPr lang="en-US" dirty="0">
+                <a:latin typeface="Times New Roman" panose="02020603050405020304" pitchFamily="18" charset="0"/>
+                <a:cs typeface="Times New Roman" panose="02020603050405020304" pitchFamily="18" charset="0"/>
+              </a:rPr>
+              <a:t>CNN widely used for MRI-based Alzheimer’s detection</a:t>
+            </a:r>
+          </a:p>
+          <a:p>
+            <a:pPr marL="285750" lvl="1" indent="-285750">
+              <a:buFont typeface="Arial" panose="020B0604020202020204" pitchFamily="34" charset="0"/>
+              <a:buChar char="•"/>
+            </a:pPr>
+            <a:r>
+              <a:rPr lang="en-US" dirty="0" err="1">
+                <a:latin typeface="Times New Roman" panose="02020603050405020304" pitchFamily="18" charset="0"/>
+                <a:cs typeface="Times New Roman" panose="02020603050405020304" pitchFamily="18" charset="0"/>
+              </a:rPr>
+              <a:t>DenseNet</a:t>
+            </a:r>
+            <a:r>
+              <a:rPr lang="en-US" dirty="0">
+                <a:latin typeface="Times New Roman" panose="02020603050405020304" pitchFamily="18" charset="0"/>
+                <a:cs typeface="Times New Roman" panose="02020603050405020304" pitchFamily="18" charset="0"/>
+              </a:rPr>
+              <a:t> most frequently best-performing model</a:t>
+            </a:r>
+          </a:p>
+          <a:p>
+            <a:pPr marL="285750" lvl="1" indent="-285750">
+              <a:buFont typeface="Arial" panose="020B0604020202020204" pitchFamily="34" charset="0"/>
+              <a:buChar char="•"/>
+            </a:pPr>
+            <a:r>
+              <a:rPr lang="en-US" dirty="0">
+                <a:latin typeface="Times New Roman" panose="02020603050405020304" pitchFamily="18" charset="0"/>
+                <a:cs typeface="Times New Roman" panose="02020603050405020304" pitchFamily="18" charset="0"/>
+              </a:rPr>
+              <a:t>Transfer Learning improves performance</a:t>
+            </a:r>
+          </a:p>
+          <a:p>
+            <a:pPr marL="285750" lvl="1" indent="-285750">
+              <a:buFont typeface="Arial" panose="020B0604020202020204" pitchFamily="34" charset="0"/>
+              <a:buChar char="•"/>
+            </a:pPr>
+            <a:r>
+              <a:rPr lang="en-US" dirty="0">
+                <a:latin typeface="Times New Roman" panose="02020603050405020304" pitchFamily="18" charset="0"/>
+                <a:cs typeface="Times New Roman" panose="02020603050405020304" pitchFamily="18" charset="0"/>
+              </a:rPr>
+              <a:t>Class imbalance is a major challenge</a:t>
+            </a:r>
+          </a:p>
+        </p:txBody>
+      </p:sp>
+      <p:sp>
+        <p:nvSpPr>
+          <p:cNvPr id="4" name="Text Placeholder 3">
+            <a:extLst>
+              <a:ext uri="{FF2B5EF4-FFF2-40B4-BE49-F238E27FC236}">
+                <a16:creationId xmlns:a16="http://schemas.microsoft.com/office/drawing/2014/main" id="{CFF39330-56D5-4430-9E0E-106E5C9D8645}"/>
+              </a:ext>
+            </a:extLst>
+          </p:cNvPr>
+          <p:cNvSpPr>
+            <a:spLocks noGrp="1"/>
+          </p:cNvSpPr>
+          <p:nvPr>
+            <p:ph type="body"/>
+          </p:nvPr>
+        </p:nvSpPr>
+        <p:spPr>
+          <a:xfrm>
+            <a:off x="4701480" y="1532160"/>
+            <a:ext cx="4015800" cy="2077560"/>
+          </a:xfrm>
+        </p:spPr>
+        <p:txBody>
+          <a:bodyPr>
+            <a:noAutofit/>
+          </a:bodyPr>
+          <a:lstStyle/>
+          <a:p>
+            <a:r>
+              <a:rPr lang="en-US" sz="2000" b="1" dirty="0">
+                <a:latin typeface="Times New Roman" panose="02020603050405020304" pitchFamily="18" charset="0"/>
+                <a:cs typeface="Times New Roman" panose="02020603050405020304" pitchFamily="18" charset="0"/>
+              </a:rPr>
+              <a:t>Research Gap</a:t>
+            </a:r>
+          </a:p>
+          <a:p>
+            <a:pPr marL="285750" lvl="1" indent="-285750">
+              <a:buFont typeface="Arial" panose="020B0604020202020204" pitchFamily="34" charset="0"/>
+              <a:buChar char="•"/>
+            </a:pPr>
+            <a:r>
+              <a:rPr lang="en-US" sz="1700" dirty="0">
+                <a:latin typeface="Times New Roman" panose="02020603050405020304" pitchFamily="18" charset="0"/>
+                <a:cs typeface="Times New Roman" panose="02020603050405020304" pitchFamily="18" charset="0"/>
+              </a:rPr>
+              <a:t>Most works use:</a:t>
+            </a:r>
+          </a:p>
+          <a:p>
+            <a:pPr marL="285750" lvl="2" indent="-285750">
+              <a:buFont typeface="Arial" panose="020B0604020202020204" pitchFamily="34" charset="0"/>
+              <a:buChar char="•"/>
+            </a:pPr>
+            <a:r>
+              <a:rPr lang="en-US" sz="1700" dirty="0">
+                <a:latin typeface="Times New Roman" panose="02020603050405020304" pitchFamily="18" charset="0"/>
+                <a:cs typeface="Times New Roman" panose="02020603050405020304" pitchFamily="18" charset="0"/>
+              </a:rPr>
+              <a:t>Basic augmentation / class weighting</a:t>
+            </a:r>
+          </a:p>
+          <a:p>
+            <a:pPr marL="285750" lvl="2" indent="-285750">
+              <a:buFont typeface="Arial" panose="020B0604020202020204" pitchFamily="34" charset="0"/>
+              <a:buChar char="•"/>
+            </a:pPr>
+            <a:r>
+              <a:rPr lang="en-US" sz="1700" dirty="0">
+                <a:latin typeface="Times New Roman" panose="02020603050405020304" pitchFamily="18" charset="0"/>
+                <a:cs typeface="Times New Roman" panose="02020603050405020304" pitchFamily="18" charset="0"/>
+              </a:rPr>
+              <a:t>Limited use of:</a:t>
+            </a:r>
+          </a:p>
+          <a:p>
+            <a:pPr marL="285750" lvl="2" indent="-285750">
+              <a:buFont typeface="Arial" panose="020B0604020202020204" pitchFamily="34" charset="0"/>
+              <a:buChar char="•"/>
+            </a:pPr>
+            <a:r>
+              <a:rPr lang="en-US" sz="1700" dirty="0">
+                <a:latin typeface="Times New Roman" panose="02020603050405020304" pitchFamily="18" charset="0"/>
+                <a:cs typeface="Times New Roman" panose="02020603050405020304" pitchFamily="18" charset="0"/>
+              </a:rPr>
+              <a:t>Advanced loss functions</a:t>
+            </a:r>
+          </a:p>
+          <a:p>
+            <a:pPr marL="285750" lvl="2" indent="-285750">
+              <a:buFont typeface="Arial" panose="020B0604020202020204" pitchFamily="34" charset="0"/>
+              <a:buChar char="•"/>
+            </a:pPr>
+            <a:r>
+              <a:rPr lang="en-US" sz="1700" dirty="0">
+                <a:latin typeface="Times New Roman" panose="02020603050405020304" pitchFamily="18" charset="0"/>
+                <a:cs typeface="Times New Roman" panose="02020603050405020304" pitchFamily="18" charset="0"/>
+              </a:rPr>
+              <a:t>Robust inference </a:t>
+            </a:r>
+            <a:r>
+              <a:rPr lang="en-US" dirty="0">
+                <a:latin typeface="Times New Roman" panose="02020603050405020304" pitchFamily="18" charset="0"/>
+                <a:cs typeface="Times New Roman" panose="02020603050405020304" pitchFamily="18" charset="0"/>
+              </a:rPr>
+              <a:t>techniques</a:t>
+            </a:r>
+            <a:endParaRPr lang="en-IN" dirty="0">
+              <a:latin typeface="Times New Roman" panose="02020603050405020304" pitchFamily="18" charset="0"/>
+              <a:cs typeface="Times New Roman" panose="02020603050405020304" pitchFamily="18" charset="0"/>
+            </a:endParaRPr>
+          </a:p>
+        </p:txBody>
+      </p:sp>
+      <p:sp>
+        <p:nvSpPr>
+          <p:cNvPr id="5" name="Text Placeholder 4">
+            <a:extLst>
+              <a:ext uri="{FF2B5EF4-FFF2-40B4-BE49-F238E27FC236}">
+                <a16:creationId xmlns:a16="http://schemas.microsoft.com/office/drawing/2014/main" id="{9CCF35D1-7C0F-4E9C-B3A3-9DA6384C0A90}"/>
+              </a:ext>
+            </a:extLst>
+          </p:cNvPr>
+          <p:cNvSpPr>
+            <a:spLocks noGrp="1"/>
+          </p:cNvSpPr>
+          <p:nvPr>
+            <p:ph type="body"/>
+          </p:nvPr>
+        </p:nvSpPr>
+        <p:spPr>
+          <a:xfrm>
+            <a:off x="365760" y="3889344"/>
+            <a:ext cx="4396682" cy="2340768"/>
+          </a:xfrm>
+        </p:spPr>
+        <p:txBody>
+          <a:bodyPr>
+            <a:noAutofit/>
+          </a:bodyPr>
+          <a:lstStyle/>
+          <a:p>
+            <a:r>
+              <a:rPr lang="en-IN" sz="2000" b="1" dirty="0">
+                <a:latin typeface="Times New Roman" panose="02020603050405020304" pitchFamily="18" charset="0"/>
+                <a:cs typeface="Times New Roman" panose="02020603050405020304" pitchFamily="18" charset="0"/>
+              </a:rPr>
+              <a:t>My Approach</a:t>
+            </a:r>
+          </a:p>
+          <a:p>
+            <a:pPr marL="285750" lvl="1" indent="-285750">
+              <a:buFont typeface="Arial" panose="020B0604020202020204" pitchFamily="34" charset="0"/>
+              <a:buChar char="•"/>
+            </a:pPr>
+            <a:r>
+              <a:rPr lang="en-IN" sz="1600" dirty="0">
+                <a:latin typeface="Times New Roman" panose="02020603050405020304" pitchFamily="18" charset="0"/>
+                <a:cs typeface="Times New Roman" panose="02020603050405020304" pitchFamily="18" charset="0"/>
+              </a:rPr>
+              <a:t>Built on </a:t>
+            </a:r>
+            <a:r>
+              <a:rPr lang="en-IN" sz="1600" dirty="0" err="1">
+                <a:latin typeface="Times New Roman" panose="02020603050405020304" pitchFamily="18" charset="0"/>
+                <a:cs typeface="Times New Roman" panose="02020603050405020304" pitchFamily="18" charset="0"/>
+              </a:rPr>
+              <a:t>DenseNet</a:t>
+            </a:r>
+            <a:endParaRPr lang="en-IN" sz="1600" dirty="0">
+              <a:latin typeface="Times New Roman" panose="02020603050405020304" pitchFamily="18" charset="0"/>
+              <a:cs typeface="Times New Roman" panose="02020603050405020304" pitchFamily="18" charset="0"/>
+            </a:endParaRPr>
+          </a:p>
+          <a:p>
+            <a:pPr marL="285750" lvl="1" indent="-285750">
+              <a:buFont typeface="Arial" panose="020B0604020202020204" pitchFamily="34" charset="0"/>
+              <a:buChar char="•"/>
+            </a:pPr>
+            <a:r>
+              <a:rPr lang="en-IN" sz="1600" dirty="0">
+                <a:latin typeface="Times New Roman" panose="02020603050405020304" pitchFamily="18" charset="0"/>
+                <a:cs typeface="Times New Roman" panose="02020603050405020304" pitchFamily="18" charset="0"/>
+              </a:rPr>
+              <a:t>Applied:</a:t>
+            </a:r>
+          </a:p>
+          <a:p>
+            <a:pPr lvl="3"/>
+            <a:r>
+              <a:rPr lang="en-IN" sz="1600" dirty="0">
+                <a:latin typeface="Times New Roman" panose="02020603050405020304" pitchFamily="18" charset="0"/>
+                <a:cs typeface="Times New Roman" panose="02020603050405020304" pitchFamily="18" charset="0"/>
+              </a:rPr>
+              <a:t>               - Focal Loss (better imbalance handling)</a:t>
+            </a:r>
+          </a:p>
+          <a:p>
+            <a:pPr lvl="3"/>
+            <a:r>
+              <a:rPr lang="en-IN" sz="1600" dirty="0">
+                <a:latin typeface="Times New Roman" panose="02020603050405020304" pitchFamily="18" charset="0"/>
+                <a:cs typeface="Times New Roman" panose="02020603050405020304" pitchFamily="18" charset="0"/>
+              </a:rPr>
+              <a:t>               -TTA (more robust predictions)</a:t>
+            </a:r>
+          </a:p>
+          <a:p>
+            <a:pPr lvl="3"/>
+            <a:r>
+              <a:rPr lang="en-IN" sz="1600" dirty="0">
+                <a:latin typeface="Times New Roman" panose="02020603050405020304" pitchFamily="18" charset="0"/>
+                <a:cs typeface="Times New Roman" panose="02020603050405020304" pitchFamily="18" charset="0"/>
+              </a:rPr>
+              <a:t>               - Grad-CAM (model interpretability)</a:t>
+            </a:r>
+          </a:p>
+          <a:p>
+            <a:r>
+              <a:rPr lang="en-IN" sz="1600" b="1" dirty="0">
+                <a:latin typeface="Times New Roman" panose="02020603050405020304" pitchFamily="18" charset="0"/>
+                <a:cs typeface="Times New Roman" panose="02020603050405020304" pitchFamily="18" charset="0"/>
+              </a:rPr>
+              <a:t> </a:t>
+            </a:r>
+          </a:p>
+        </p:txBody>
+      </p:sp>
+      <p:sp>
+        <p:nvSpPr>
+          <p:cNvPr id="7" name="TextBox 6">
+            <a:extLst>
+              <a:ext uri="{FF2B5EF4-FFF2-40B4-BE49-F238E27FC236}">
+                <a16:creationId xmlns:a16="http://schemas.microsoft.com/office/drawing/2014/main" id="{B888ACC7-1874-45DC-B4E8-C8080A9FBB5D}"/>
+              </a:ext>
+            </a:extLst>
+          </p:cNvPr>
+          <p:cNvSpPr txBox="1"/>
+          <p:nvPr/>
+        </p:nvSpPr>
+        <p:spPr>
+          <a:xfrm>
+            <a:off x="4762442" y="4152552"/>
+            <a:ext cx="3901440" cy="1169551"/>
+          </a:xfrm>
+          <a:prstGeom prst="rect">
+            <a:avLst/>
+          </a:prstGeom>
+          <a:noFill/>
+        </p:spPr>
+        <p:txBody>
+          <a:bodyPr wrap="square" rtlCol="0">
+            <a:spAutoFit/>
+          </a:bodyPr>
+          <a:lstStyle/>
+          <a:p>
+            <a:r>
+              <a:rPr lang="en-IN" sz="2000" b="1" dirty="0">
+                <a:latin typeface="Times New Roman" panose="02020603050405020304" pitchFamily="18" charset="0"/>
+                <a:cs typeface="Times New Roman" panose="02020603050405020304" pitchFamily="18" charset="0"/>
+              </a:rPr>
+              <a:t>Outcome</a:t>
+            </a:r>
+          </a:p>
+          <a:p>
+            <a:pPr marL="285750" indent="-285750">
+              <a:buFont typeface="Arial" panose="020B0604020202020204" pitchFamily="34" charset="0"/>
+              <a:buChar char="•"/>
+            </a:pPr>
+            <a:r>
+              <a:rPr lang="en-IN" sz="1600" dirty="0">
+                <a:latin typeface="Times New Roman" panose="02020603050405020304" pitchFamily="18" charset="0"/>
+                <a:cs typeface="Times New Roman" panose="02020603050405020304" pitchFamily="18" charset="0"/>
+              </a:rPr>
+              <a:t>94% Balanced Accuracy</a:t>
+            </a:r>
+          </a:p>
+          <a:p>
+            <a:pPr marL="285750" indent="-285750">
+              <a:buFont typeface="Arial" panose="020B0604020202020204" pitchFamily="34" charset="0"/>
+              <a:buChar char="•"/>
+            </a:pPr>
+            <a:r>
+              <a:rPr lang="en-IN" sz="1600" dirty="0">
+                <a:latin typeface="Times New Roman" panose="02020603050405020304" pitchFamily="18" charset="0"/>
+                <a:cs typeface="Times New Roman" panose="02020603050405020304" pitchFamily="18" charset="0"/>
+              </a:rPr>
+              <a:t>Improved minority class detection</a:t>
+            </a:r>
+          </a:p>
+          <a:p>
+            <a:endParaRPr lang="en-IN" dirty="0"/>
+          </a:p>
+        </p:txBody>
+      </p:sp>
+      <p:sp>
+        <p:nvSpPr>
+          <p:cNvPr id="8" name="TextBox 7">
+            <a:extLst>
+              <a:ext uri="{FF2B5EF4-FFF2-40B4-BE49-F238E27FC236}">
+                <a16:creationId xmlns:a16="http://schemas.microsoft.com/office/drawing/2014/main" id="{B7F41A2E-B87C-41D4-A91E-B7481A1D642E}"/>
+              </a:ext>
+            </a:extLst>
+          </p:cNvPr>
+          <p:cNvSpPr txBox="1"/>
+          <p:nvPr/>
+        </p:nvSpPr>
+        <p:spPr>
+          <a:xfrm>
+            <a:off x="163200" y="980308"/>
+            <a:ext cx="4511040" cy="400110"/>
+          </a:xfrm>
+          <a:prstGeom prst="rect">
+            <a:avLst/>
+          </a:prstGeom>
+          <a:noFill/>
+        </p:spPr>
+        <p:txBody>
+          <a:bodyPr wrap="square" rtlCol="0">
+            <a:spAutoFit/>
+          </a:bodyPr>
+          <a:lstStyle/>
+          <a:p>
+            <a:r>
+              <a:rPr lang="en-IN" sz="2000" b="1" dirty="0">
+                <a:latin typeface="Times New Roman" panose="02020603050405020304" pitchFamily="18" charset="0"/>
+                <a:cs typeface="Times New Roman" panose="02020603050405020304" pitchFamily="18" charset="0"/>
+              </a:rPr>
+              <a:t>Reviewed 36 Research Papers</a:t>
+            </a:r>
+          </a:p>
+        </p:txBody>
+      </p:sp>
+      <p:pic>
+        <p:nvPicPr>
+          <p:cNvPr id="8196" name="Picture 4" descr="Hand Writing Notes with Pencil on Paper Sketch Style Stock Illustration -  Illustration of education, hand: 408832485">
+            <a:extLst>
+              <a:ext uri="{FF2B5EF4-FFF2-40B4-BE49-F238E27FC236}">
+                <a16:creationId xmlns:a16="http://schemas.microsoft.com/office/drawing/2014/main" id="{40201D95-74BF-4961-A2C2-3E7353A54F15}"/>
+              </a:ext>
+            </a:extLst>
+          </p:cNvPr>
+          <p:cNvPicPr>
+            <a:picLocks noChangeAspect="1" noChangeArrowheads="1"/>
+          </p:cNvPicPr>
+          <p:nvPr/>
+        </p:nvPicPr>
+        <p:blipFill>
+          <a:blip r:embed="rId2" cstate="print">
+            <a:extLst>
+              <a:ext uri="{28A0092B-C50C-407E-A947-70E740481C1C}">
+                <a14:useLocalDpi xmlns:a14="http://schemas.microsoft.com/office/drawing/2010/main" val="0"/>
+              </a:ext>
+            </a:extLst>
+          </a:blip>
+          <a:srcRect/>
+          <a:stretch>
+            <a:fillRect/>
+          </a:stretch>
+        </p:blipFill>
+        <p:spPr bwMode="auto">
+          <a:xfrm>
+            <a:off x="7092696" y="4978987"/>
+            <a:ext cx="1685544" cy="1685544"/>
+          </a:xfrm>
+          <a:prstGeom prst="rect">
+            <a:avLst/>
+          </a:prstGeom>
+          <a:noFill/>
+          <a:extLst>
+            <a:ext uri="{909E8E84-426E-40DD-AFC4-6F175D3DCCD1}">
+              <a14:hiddenFill xmlns:a14="http://schemas.microsoft.com/office/drawing/2010/main">
+                <a:solidFill>
+                  <a:srgbClr val="FFFFFF"/>
+                </a:solidFill>
+              </a14:hiddenFill>
+            </a:ext>
+          </a:extLst>
+        </p:spPr>
+      </p:pic>
+    </p:spTree>
+    <p:extLst>
+      <p:ext uri="{BB962C8B-B14F-4D97-AF65-F5344CB8AC3E}">
+        <p14:creationId xmlns:p14="http://schemas.microsoft.com/office/powerpoint/2010/main" val="73247252"/>
+      </p:ext>
+    </p:extLst>
+  </p:cSld>
+  <p:clrMapOvr>
+    <a:masterClrMapping/>
+  </p:clrMapOvr>
+</p:sld>
+</file>
+
+<file path=ppt/slides/slide8.xml><?xml version="1.0" encoding="utf-8"?>
+<p:sld xmlns:a="http://schemas.openxmlformats.org/drawingml/2006/main" xmlns:r="http://schemas.openxmlformats.org/officeDocument/2006/relationships" xmlns:p="http://schemas.openxmlformats.org/presentationml/2006/main">
+  <p:cSld>
+    <p:spTree>
+      <p:nvGrpSpPr>
+        <p:cNvPr id="1" name=""/>
+        <p:cNvGrpSpPr/>
+        <p:nvPr/>
+      </p:nvGrpSpPr>
+      <p:grpSpPr>
+        <a:xfrm>
+          <a:off x="0" y="0"/>
+          <a:ext cx="0" cy="0"/>
+          <a:chOff x="0" y="0"/>
+          <a:chExt cx="0" cy="0"/>
+        </a:xfrm>
+      </p:grpSpPr>
+      <p:sp>
+        <p:nvSpPr>
+          <p:cNvPr id="2" name="Title 1">
+            <a:extLst>
+              <a:ext uri="{FF2B5EF4-FFF2-40B4-BE49-F238E27FC236}">
                 <a16:creationId xmlns:a16="http://schemas.microsoft.com/office/drawing/2014/main" id="{8145A481-5872-4AD9-9691-99955A1065E0}"/>
               </a:ext>
             </a:extLst>
@@ -6857,7 +7471,7 @@
 </p:sld>
 </file>
 
-<file path=ppt/slides/slide8.xml><?xml version="1.0" encoding="utf-8"?>
+<file path=ppt/slides/slide9.xml><?xml version="1.0" encoding="utf-8"?>
 <p:sld xmlns:a="http://schemas.openxmlformats.org/drawingml/2006/main" xmlns:r="http://schemas.openxmlformats.org/officeDocument/2006/relationships" xmlns:p="http://schemas.openxmlformats.org/presentationml/2006/main">
   <p:cSld>
     <p:spTree>
@@ -7100,554 +7714,6 @@
     <p:extLst>
       <p:ext uri="{BB962C8B-B14F-4D97-AF65-F5344CB8AC3E}">
         <p14:creationId xmlns:p14="http://schemas.microsoft.com/office/powerpoint/2010/main" val="2092866614"/>
-      </p:ext>
-    </p:extLst>
-  </p:cSld>
-  <p:clrMapOvr>
-    <a:masterClrMapping/>
-  </p:clrMapOvr>
-</p:sld>
-</file>
-
-<file path=ppt/slides/slide9.xml><?xml version="1.0" encoding="utf-8"?>
-<p:sld xmlns:a="http://schemas.openxmlformats.org/drawingml/2006/main" xmlns:r="http://schemas.openxmlformats.org/officeDocument/2006/relationships" xmlns:p="http://schemas.openxmlformats.org/presentationml/2006/main">
-  <p:cSld>
-    <p:spTree>
-      <p:nvGrpSpPr>
-        <p:cNvPr id="1" name=""/>
-        <p:cNvGrpSpPr/>
-        <p:nvPr/>
-      </p:nvGrpSpPr>
-      <p:grpSpPr>
-        <a:xfrm>
-          <a:off x="0" y="0"/>
-          <a:ext cx="0" cy="0"/>
-          <a:chOff x="0" y="0"/>
-          <a:chExt cx="0" cy="0"/>
-        </a:xfrm>
-      </p:grpSpPr>
-      <p:sp>
-        <p:nvSpPr>
-          <p:cNvPr id="2" name="Title 1">
-            <a:extLst>
-              <a:ext uri="{FF2B5EF4-FFF2-40B4-BE49-F238E27FC236}">
-                <a16:creationId xmlns:a16="http://schemas.microsoft.com/office/drawing/2014/main" id="{8C464057-151F-46CF-AF69-626B8FA7F150}"/>
-              </a:ext>
-            </a:extLst>
-          </p:cNvPr>
-          <p:cNvSpPr>
-            <a:spLocks noGrp="1"/>
-          </p:cNvSpPr>
-          <p:nvPr>
-            <p:ph type="title"/>
-          </p:nvPr>
-        </p:nvSpPr>
-        <p:spPr/>
-        <p:txBody>
-          <a:bodyPr/>
-          <a:lstStyle/>
-          <a:p>
-            <a:pPr algn="ctr"/>
-            <a:r>
-              <a:rPr lang="en-IN" sz="3200" dirty="0">
-                <a:latin typeface="Times New Roman" panose="02020603050405020304" pitchFamily="18" charset="0"/>
-                <a:cs typeface="Times New Roman" panose="02020603050405020304" pitchFamily="18" charset="0"/>
-              </a:rPr>
-              <a:t>Literature Review</a:t>
-            </a:r>
-          </a:p>
-        </p:txBody>
-      </p:sp>
-      <p:sp>
-        <p:nvSpPr>
-          <p:cNvPr id="3" name="Text Placeholder 2">
-            <a:extLst>
-              <a:ext uri="{FF2B5EF4-FFF2-40B4-BE49-F238E27FC236}">
-                <a16:creationId xmlns:a16="http://schemas.microsoft.com/office/drawing/2014/main" id="{C3BEA711-0EDE-4C19-8651-4B28D2029347}"/>
-              </a:ext>
-            </a:extLst>
-          </p:cNvPr>
-          <p:cNvSpPr>
-            <a:spLocks noGrp="1"/>
-          </p:cNvSpPr>
-          <p:nvPr>
-            <p:ph type="body"/>
-          </p:nvPr>
-        </p:nvSpPr>
-        <p:spPr>
-          <a:xfrm>
-            <a:off x="163200" y="1380418"/>
-            <a:ext cx="4015800" cy="2772134"/>
-          </a:xfrm>
-        </p:spPr>
-        <p:txBody>
-          <a:bodyPr>
-            <a:normAutofit/>
-          </a:bodyPr>
-          <a:lstStyle/>
-          <a:p>
-            <a:r>
-              <a:rPr lang="en-US" sz="2000" b="1" dirty="0">
-                <a:latin typeface="Times New Roman" panose="02020603050405020304" pitchFamily="18" charset="0"/>
-                <a:cs typeface="Times New Roman" panose="02020603050405020304" pitchFamily="18" charset="0"/>
-              </a:rPr>
-              <a:t> Key Insights</a:t>
-            </a:r>
-          </a:p>
-          <a:p>
-            <a:pPr marL="285750" lvl="1" indent="-285750">
-              <a:buFont typeface="Arial" panose="020B0604020202020204" pitchFamily="34" charset="0"/>
-              <a:buChar char="•"/>
-            </a:pPr>
-            <a:r>
-              <a:rPr lang="en-US" dirty="0">
-                <a:latin typeface="Times New Roman" panose="02020603050405020304" pitchFamily="18" charset="0"/>
-                <a:cs typeface="Times New Roman" panose="02020603050405020304" pitchFamily="18" charset="0"/>
-              </a:rPr>
-              <a:t>CNN widely used for MRI-based Alzheimer’s detection</a:t>
-            </a:r>
-          </a:p>
-          <a:p>
-            <a:pPr marL="285750" lvl="1" indent="-285750">
-              <a:buFont typeface="Arial" panose="020B0604020202020204" pitchFamily="34" charset="0"/>
-              <a:buChar char="•"/>
-            </a:pPr>
-            <a:r>
-              <a:rPr lang="en-US" dirty="0" err="1">
-                <a:latin typeface="Times New Roman" panose="02020603050405020304" pitchFamily="18" charset="0"/>
-                <a:cs typeface="Times New Roman" panose="02020603050405020304" pitchFamily="18" charset="0"/>
-              </a:rPr>
-              <a:t>DenseNet</a:t>
-            </a:r>
-            <a:r>
-              <a:rPr lang="en-US" dirty="0">
-                <a:latin typeface="Times New Roman" panose="02020603050405020304" pitchFamily="18" charset="0"/>
-                <a:cs typeface="Times New Roman" panose="02020603050405020304" pitchFamily="18" charset="0"/>
-              </a:rPr>
-              <a:t> most frequently best-performing model</a:t>
-            </a:r>
-          </a:p>
-          <a:p>
-            <a:pPr marL="285750" lvl="1" indent="-285750">
-              <a:buFont typeface="Arial" panose="020B0604020202020204" pitchFamily="34" charset="0"/>
-              <a:buChar char="•"/>
-            </a:pPr>
-            <a:r>
-              <a:rPr lang="en-US" dirty="0">
-                <a:latin typeface="Times New Roman" panose="02020603050405020304" pitchFamily="18" charset="0"/>
-                <a:cs typeface="Times New Roman" panose="02020603050405020304" pitchFamily="18" charset="0"/>
-              </a:rPr>
-              <a:t>Transfer Learning improves performance</a:t>
-            </a:r>
-          </a:p>
-          <a:p>
-            <a:pPr marL="285750" lvl="1" indent="-285750">
-              <a:buFont typeface="Arial" panose="020B0604020202020204" pitchFamily="34" charset="0"/>
-              <a:buChar char="•"/>
-            </a:pPr>
-            <a:r>
-              <a:rPr lang="en-US" dirty="0">
-                <a:latin typeface="Times New Roman" panose="02020603050405020304" pitchFamily="18" charset="0"/>
-                <a:cs typeface="Times New Roman" panose="02020603050405020304" pitchFamily="18" charset="0"/>
-              </a:rPr>
-              <a:t>Class imbalance is a major challenge</a:t>
-            </a:r>
-          </a:p>
-        </p:txBody>
-      </p:sp>
-      <p:sp>
-        <p:nvSpPr>
-          <p:cNvPr id="4" name="Text Placeholder 3">
-            <a:extLst>
-              <a:ext uri="{FF2B5EF4-FFF2-40B4-BE49-F238E27FC236}">
-                <a16:creationId xmlns:a16="http://schemas.microsoft.com/office/drawing/2014/main" id="{CFF39330-56D5-4430-9E0E-106E5C9D8645}"/>
-              </a:ext>
-            </a:extLst>
-          </p:cNvPr>
-          <p:cNvSpPr>
-            <a:spLocks noGrp="1"/>
-          </p:cNvSpPr>
-          <p:nvPr>
-            <p:ph type="body"/>
-          </p:nvPr>
-        </p:nvSpPr>
-        <p:spPr>
-          <a:xfrm>
-            <a:off x="4701480" y="1532160"/>
-            <a:ext cx="4015800" cy="2077560"/>
-          </a:xfrm>
-        </p:spPr>
-        <p:txBody>
-          <a:bodyPr>
-            <a:noAutofit/>
-          </a:bodyPr>
-          <a:lstStyle/>
-          <a:p>
-            <a:r>
-              <a:rPr lang="en-US" sz="2000" b="1" dirty="0">
-                <a:latin typeface="Times New Roman" panose="02020603050405020304" pitchFamily="18" charset="0"/>
-                <a:cs typeface="Times New Roman" panose="02020603050405020304" pitchFamily="18" charset="0"/>
-              </a:rPr>
-              <a:t>Research Gap</a:t>
-            </a:r>
-          </a:p>
-          <a:p>
-            <a:pPr marL="285750" lvl="1" indent="-285750">
-              <a:buFont typeface="Arial" panose="020B0604020202020204" pitchFamily="34" charset="0"/>
-              <a:buChar char="•"/>
-            </a:pPr>
-            <a:r>
-              <a:rPr lang="en-US" sz="1700" dirty="0">
-                <a:latin typeface="Times New Roman" panose="02020603050405020304" pitchFamily="18" charset="0"/>
-                <a:cs typeface="Times New Roman" panose="02020603050405020304" pitchFamily="18" charset="0"/>
-              </a:rPr>
-              <a:t>Most works use:</a:t>
-            </a:r>
-          </a:p>
-          <a:p>
-            <a:pPr marL="285750" lvl="2" indent="-285750">
-              <a:buFont typeface="Arial" panose="020B0604020202020204" pitchFamily="34" charset="0"/>
-              <a:buChar char="•"/>
-            </a:pPr>
-            <a:r>
-              <a:rPr lang="en-US" sz="1700" dirty="0">
-                <a:latin typeface="Times New Roman" panose="02020603050405020304" pitchFamily="18" charset="0"/>
-                <a:cs typeface="Times New Roman" panose="02020603050405020304" pitchFamily="18" charset="0"/>
-              </a:rPr>
-              <a:t>Basic augmentation / class weighting</a:t>
-            </a:r>
-          </a:p>
-          <a:p>
-            <a:pPr marL="285750" lvl="2" indent="-285750">
-              <a:buFont typeface="Arial" panose="020B0604020202020204" pitchFamily="34" charset="0"/>
-              <a:buChar char="•"/>
-            </a:pPr>
-            <a:r>
-              <a:rPr lang="en-US" sz="1700" dirty="0">
-                <a:latin typeface="Times New Roman" panose="02020603050405020304" pitchFamily="18" charset="0"/>
-                <a:cs typeface="Times New Roman" panose="02020603050405020304" pitchFamily="18" charset="0"/>
-              </a:rPr>
-              <a:t>Limited use of:</a:t>
-            </a:r>
-          </a:p>
-          <a:p>
-            <a:pPr marL="285750" lvl="2" indent="-285750">
-              <a:buFont typeface="Arial" panose="020B0604020202020204" pitchFamily="34" charset="0"/>
-              <a:buChar char="•"/>
-            </a:pPr>
-            <a:r>
-              <a:rPr lang="en-US" sz="1700" dirty="0">
-                <a:latin typeface="Times New Roman" panose="02020603050405020304" pitchFamily="18" charset="0"/>
-                <a:cs typeface="Times New Roman" panose="02020603050405020304" pitchFamily="18" charset="0"/>
-              </a:rPr>
-              <a:t>Advanced loss functions</a:t>
-            </a:r>
-          </a:p>
-          <a:p>
-            <a:pPr marL="285750" lvl="2" indent="-285750">
-              <a:buFont typeface="Arial" panose="020B0604020202020204" pitchFamily="34" charset="0"/>
-              <a:buChar char="•"/>
-            </a:pPr>
-            <a:r>
-              <a:rPr lang="en-US" sz="1700" dirty="0">
-                <a:latin typeface="Times New Roman" panose="02020603050405020304" pitchFamily="18" charset="0"/>
-                <a:cs typeface="Times New Roman" panose="02020603050405020304" pitchFamily="18" charset="0"/>
-              </a:rPr>
-              <a:t>Robust inference </a:t>
-            </a:r>
-            <a:r>
-              <a:rPr lang="en-US" dirty="0">
-                <a:latin typeface="Times New Roman" panose="02020603050405020304" pitchFamily="18" charset="0"/>
-                <a:cs typeface="Times New Roman" panose="02020603050405020304" pitchFamily="18" charset="0"/>
-              </a:rPr>
-              <a:t>techniques</a:t>
-            </a:r>
-            <a:endParaRPr lang="en-IN" dirty="0">
-              <a:latin typeface="Times New Roman" panose="02020603050405020304" pitchFamily="18" charset="0"/>
-              <a:cs typeface="Times New Roman" panose="02020603050405020304" pitchFamily="18" charset="0"/>
-            </a:endParaRPr>
-          </a:p>
-        </p:txBody>
-      </p:sp>
-      <p:sp>
-        <p:nvSpPr>
-          <p:cNvPr id="5" name="Text Placeholder 4">
-            <a:extLst>
-              <a:ext uri="{FF2B5EF4-FFF2-40B4-BE49-F238E27FC236}">
-                <a16:creationId xmlns:a16="http://schemas.microsoft.com/office/drawing/2014/main" id="{9CCF35D1-7C0F-4E9C-B3A3-9DA6384C0A90}"/>
-              </a:ext>
-            </a:extLst>
-          </p:cNvPr>
-          <p:cNvSpPr>
-            <a:spLocks noGrp="1"/>
-          </p:cNvSpPr>
-          <p:nvPr>
-            <p:ph type="body"/>
-          </p:nvPr>
-        </p:nvSpPr>
-        <p:spPr>
-          <a:xfrm>
-            <a:off x="365760" y="3889344"/>
-            <a:ext cx="4015800" cy="2340768"/>
-          </a:xfrm>
-        </p:spPr>
-        <p:txBody>
-          <a:bodyPr>
-            <a:noAutofit/>
-          </a:bodyPr>
-          <a:lstStyle/>
-          <a:p>
-            <a:r>
-              <a:rPr lang="en-IN" sz="2000" b="1" dirty="0">
-                <a:latin typeface="Times New Roman" panose="02020603050405020304" pitchFamily="18" charset="0"/>
-                <a:cs typeface="Times New Roman" panose="02020603050405020304" pitchFamily="18" charset="0"/>
-              </a:rPr>
-              <a:t>My Approach</a:t>
-            </a:r>
-          </a:p>
-          <a:p>
-            <a:pPr marL="285750" lvl="1" indent="-285750">
-              <a:buFont typeface="Arial" panose="020B0604020202020204" pitchFamily="34" charset="0"/>
-              <a:buChar char="•"/>
-            </a:pPr>
-            <a:r>
-              <a:rPr lang="en-IN" sz="1600" dirty="0">
-                <a:latin typeface="Times New Roman" panose="02020603050405020304" pitchFamily="18" charset="0"/>
-                <a:cs typeface="Times New Roman" panose="02020603050405020304" pitchFamily="18" charset="0"/>
-              </a:rPr>
-              <a:t>Built on </a:t>
-            </a:r>
-            <a:r>
-              <a:rPr lang="en-IN" sz="1600" dirty="0" err="1">
-                <a:latin typeface="Times New Roman" panose="02020603050405020304" pitchFamily="18" charset="0"/>
-                <a:cs typeface="Times New Roman" panose="02020603050405020304" pitchFamily="18" charset="0"/>
-              </a:rPr>
-              <a:t>DenseNet</a:t>
-            </a:r>
-            <a:endParaRPr lang="en-IN" sz="1600" dirty="0">
-              <a:latin typeface="Times New Roman" panose="02020603050405020304" pitchFamily="18" charset="0"/>
-              <a:cs typeface="Times New Roman" panose="02020603050405020304" pitchFamily="18" charset="0"/>
-            </a:endParaRPr>
-          </a:p>
-          <a:p>
-            <a:pPr marL="285750" lvl="1" indent="-285750">
-              <a:buFont typeface="Arial" panose="020B0604020202020204" pitchFamily="34" charset="0"/>
-              <a:buChar char="•"/>
-            </a:pPr>
-            <a:r>
-              <a:rPr lang="en-IN" sz="1600" dirty="0">
-                <a:latin typeface="Times New Roman" panose="02020603050405020304" pitchFamily="18" charset="0"/>
-                <a:cs typeface="Times New Roman" panose="02020603050405020304" pitchFamily="18" charset="0"/>
-              </a:rPr>
-              <a:t>Applied:</a:t>
-            </a:r>
-          </a:p>
-          <a:p>
-            <a:pPr marL="285750" lvl="2" indent="-285750">
-              <a:buFont typeface="Arial" panose="020B0604020202020204" pitchFamily="34" charset="0"/>
-              <a:buChar char="•"/>
-            </a:pPr>
-            <a:r>
-              <a:rPr lang="en-IN" sz="1600" dirty="0">
-                <a:latin typeface="Times New Roman" panose="02020603050405020304" pitchFamily="18" charset="0"/>
-                <a:cs typeface="Times New Roman" panose="02020603050405020304" pitchFamily="18" charset="0"/>
-              </a:rPr>
-              <a:t>Focal Loss (better imbalance handling)</a:t>
-            </a:r>
-          </a:p>
-          <a:p>
-            <a:pPr marL="285750" lvl="2" indent="-285750">
-              <a:buFont typeface="Arial" panose="020B0604020202020204" pitchFamily="34" charset="0"/>
-              <a:buChar char="•"/>
-            </a:pPr>
-            <a:r>
-              <a:rPr lang="en-IN" sz="1600" dirty="0">
-                <a:latin typeface="Times New Roman" panose="02020603050405020304" pitchFamily="18" charset="0"/>
-                <a:cs typeface="Times New Roman" panose="02020603050405020304" pitchFamily="18" charset="0"/>
-              </a:rPr>
-              <a:t>TTA (more robust predictions)</a:t>
-            </a:r>
-          </a:p>
-          <a:p>
-            <a:pPr marL="285750" lvl="2" indent="-285750">
-              <a:buFont typeface="Arial" panose="020B0604020202020204" pitchFamily="34" charset="0"/>
-              <a:buChar char="•"/>
-            </a:pPr>
-            <a:r>
-              <a:rPr lang="en-IN" sz="1600" dirty="0">
-                <a:latin typeface="Times New Roman" panose="02020603050405020304" pitchFamily="18" charset="0"/>
-                <a:cs typeface="Times New Roman" panose="02020603050405020304" pitchFamily="18" charset="0"/>
-              </a:rPr>
-              <a:t>Grad-CAM (model interpretability)</a:t>
-            </a:r>
-          </a:p>
-          <a:p>
-            <a:r>
-              <a:rPr lang="en-IN" sz="1600" b="1" dirty="0">
-                <a:latin typeface="Times New Roman" panose="02020603050405020304" pitchFamily="18" charset="0"/>
-                <a:cs typeface="Times New Roman" panose="02020603050405020304" pitchFamily="18" charset="0"/>
-              </a:rPr>
-              <a:t> </a:t>
-            </a:r>
-          </a:p>
-        </p:txBody>
-      </p:sp>
-      <p:sp>
-        <p:nvSpPr>
-          <p:cNvPr id="7" name="TextBox 6">
-            <a:extLst>
-              <a:ext uri="{FF2B5EF4-FFF2-40B4-BE49-F238E27FC236}">
-                <a16:creationId xmlns:a16="http://schemas.microsoft.com/office/drawing/2014/main" id="{B888ACC7-1874-45DC-B4E8-C8080A9FBB5D}"/>
-              </a:ext>
-            </a:extLst>
-          </p:cNvPr>
-          <p:cNvSpPr txBox="1"/>
-          <p:nvPr/>
-        </p:nvSpPr>
-        <p:spPr>
-          <a:xfrm>
-            <a:off x="4762442" y="4152552"/>
-            <a:ext cx="3901440" cy="1169551"/>
-          </a:xfrm>
-          <a:prstGeom prst="rect">
-            <a:avLst/>
-          </a:prstGeom>
-          <a:noFill/>
-        </p:spPr>
-        <p:txBody>
-          <a:bodyPr wrap="square" rtlCol="0">
-            <a:spAutoFit/>
-          </a:bodyPr>
-          <a:lstStyle/>
-          <a:p>
-            <a:r>
-              <a:rPr lang="en-IN" sz="2000" b="1" dirty="0">
-                <a:latin typeface="Times New Roman" panose="02020603050405020304" pitchFamily="18" charset="0"/>
-                <a:cs typeface="Times New Roman" panose="02020603050405020304" pitchFamily="18" charset="0"/>
-              </a:rPr>
-              <a:t>Outcome</a:t>
-            </a:r>
-          </a:p>
-          <a:p>
-            <a:pPr marL="285750" indent="-285750">
-              <a:buFont typeface="Arial" panose="020B0604020202020204" pitchFamily="34" charset="0"/>
-              <a:buChar char="•"/>
-            </a:pPr>
-            <a:r>
-              <a:rPr lang="en-IN" sz="1600" dirty="0">
-                <a:latin typeface="Times New Roman" panose="02020603050405020304" pitchFamily="18" charset="0"/>
-                <a:cs typeface="Times New Roman" panose="02020603050405020304" pitchFamily="18" charset="0"/>
-              </a:rPr>
-              <a:t>94% Balanced Accuracy</a:t>
-            </a:r>
-          </a:p>
-          <a:p>
-            <a:pPr marL="285750" indent="-285750">
-              <a:buFont typeface="Arial" panose="020B0604020202020204" pitchFamily="34" charset="0"/>
-              <a:buChar char="•"/>
-            </a:pPr>
-            <a:r>
-              <a:rPr lang="en-IN" sz="1600" dirty="0">
-                <a:latin typeface="Times New Roman" panose="02020603050405020304" pitchFamily="18" charset="0"/>
-                <a:cs typeface="Times New Roman" panose="02020603050405020304" pitchFamily="18" charset="0"/>
-              </a:rPr>
-              <a:t>Improved minority class detection</a:t>
-            </a:r>
-          </a:p>
-          <a:p>
-            <a:endParaRPr lang="en-IN" dirty="0"/>
-          </a:p>
-        </p:txBody>
-      </p:sp>
-      <p:sp>
-        <p:nvSpPr>
-          <p:cNvPr id="8" name="TextBox 7">
-            <a:extLst>
-              <a:ext uri="{FF2B5EF4-FFF2-40B4-BE49-F238E27FC236}">
-                <a16:creationId xmlns:a16="http://schemas.microsoft.com/office/drawing/2014/main" id="{B7F41A2E-B87C-41D4-A91E-B7481A1D642E}"/>
-              </a:ext>
-            </a:extLst>
-          </p:cNvPr>
-          <p:cNvSpPr txBox="1"/>
-          <p:nvPr/>
-        </p:nvSpPr>
-        <p:spPr>
-          <a:xfrm>
-            <a:off x="163200" y="980308"/>
-            <a:ext cx="4511040" cy="400110"/>
-          </a:xfrm>
-          <a:prstGeom prst="rect">
-            <a:avLst/>
-          </a:prstGeom>
-          <a:noFill/>
-        </p:spPr>
-        <p:txBody>
-          <a:bodyPr wrap="square" rtlCol="0">
-            <a:spAutoFit/>
-          </a:bodyPr>
-          <a:lstStyle/>
-          <a:p>
-            <a:r>
-              <a:rPr lang="en-IN" sz="2000" b="1" dirty="0">
-                <a:latin typeface="Times New Roman" panose="02020603050405020304" pitchFamily="18" charset="0"/>
-                <a:cs typeface="Times New Roman" panose="02020603050405020304" pitchFamily="18" charset="0"/>
-              </a:rPr>
-              <a:t>Reviewed 36 Research Papers</a:t>
-            </a:r>
-          </a:p>
-        </p:txBody>
-      </p:sp>
-      <p:pic>
-        <p:nvPicPr>
-          <p:cNvPr id="8196" name="Picture 4" descr="Hand Writing Notes with Pencil on Paper Sketch Style Stock Illustration -  Illustration of education, hand: 408832485">
-            <a:extLst>
-              <a:ext uri="{FF2B5EF4-FFF2-40B4-BE49-F238E27FC236}">
-                <a16:creationId xmlns:a16="http://schemas.microsoft.com/office/drawing/2014/main" id="{40201D95-74BF-4961-A2C2-3E7353A54F15}"/>
-              </a:ext>
-            </a:extLst>
-          </p:cNvPr>
-          <p:cNvPicPr>
-            <a:picLocks noChangeAspect="1" noChangeArrowheads="1"/>
-          </p:cNvPicPr>
-          <p:nvPr/>
-        </p:nvPicPr>
-        <p:blipFill>
-          <a:blip r:embed="rId2" cstate="print">
-            <a:extLst>
-              <a:ext uri="{28A0092B-C50C-407E-A947-70E740481C1C}">
-                <a14:useLocalDpi xmlns:a14="http://schemas.microsoft.com/office/drawing/2010/main" val="0"/>
-              </a:ext>
-            </a:extLst>
-          </a:blip>
-          <a:srcRect/>
-          <a:stretch>
-            <a:fillRect/>
-          </a:stretch>
-        </p:blipFill>
-        <p:spPr bwMode="auto">
-          <a:xfrm>
-            <a:off x="7092696" y="4978987"/>
-            <a:ext cx="1685544" cy="1685544"/>
-          </a:xfrm>
-          <a:prstGeom prst="rect">
-            <a:avLst/>
-          </a:prstGeom>
-          <a:noFill/>
-          <a:extLst>
-            <a:ext uri="{909E8E84-426E-40DD-AFC4-6F175D3DCCD1}">
-              <a14:hiddenFill xmlns:a14="http://schemas.microsoft.com/office/drawing/2010/main">
-                <a:solidFill>
-                  <a:srgbClr val="FFFFFF"/>
-                </a:solidFill>
-              </a14:hiddenFill>
-            </a:ext>
-          </a:extLst>
-        </p:spPr>
-      </p:pic>
-    </p:spTree>
-    <p:extLst>
-      <p:ext uri="{BB962C8B-B14F-4D97-AF65-F5344CB8AC3E}">
-        <p14:creationId xmlns:p14="http://schemas.microsoft.com/office/powerpoint/2010/main" val="73247252"/>
       </p:ext>
     </p:extLst>
   </p:cSld>
@@ -8442,21 +8508,6 @@
 </file>
 
 <file path=customXml/item1.xml><?xml version="1.0" encoding="utf-8"?>
-<p:properties xmlns:p="http://schemas.microsoft.com/office/2006/metadata/properties" xmlns:xsi="http://www.w3.org/2001/XMLSchema-instance" xmlns:pc="http://schemas.microsoft.com/office/infopath/2007/PartnerControls">
-  <documentManagement/>
-</p:properties>
-</file>
-
-<file path=customXml/item2.xml><?xml version="1.0" encoding="utf-8"?>
-<?mso-contentType ?>
-<FormTemplates xmlns="http://schemas.microsoft.com/sharepoint/v3/contenttype/forms">
-  <Display>DocumentLibraryForm</Display>
-  <Edit>DocumentLibraryForm</Edit>
-  <New>DocumentLibraryForm</New>
-</FormTemplates>
-</file>
-
-<file path=customXml/item3.xml><?xml version="1.0" encoding="utf-8"?>
 <ct:contentTypeSchema xmlns:ct="http://schemas.microsoft.com/office/2006/metadata/contentType" xmlns:ma="http://schemas.microsoft.com/office/2006/metadata/properties/metaAttributes" ct:_="" ma:_="" ma:contentTypeName="Document" ma:contentTypeID="0x010100096F1BF43DDE004485E7A868D137D60A" ma:contentTypeVersion="0" ma:contentTypeDescription="Create a new document." ma:contentTypeScope="" ma:versionID="47fff7f98a9c49c088ba096c14cf4458">
   <xsd:schema xmlns:xsd="http://www.w3.org/2001/XMLSchema" xmlns:xs="http://www.w3.org/2001/XMLSchema" xmlns:p="http://schemas.microsoft.com/office/2006/metadata/properties" targetNamespace="http://schemas.microsoft.com/office/2006/metadata/properties" ma:root="true" ma:fieldsID="c05e9f2c4932a6a674126b9dde7716ea">
     <xsd:element name="properties">
@@ -8570,17 +8621,33 @@
 </ct:contentTypeSchema>
 </file>
 
+<file path=customXml/item2.xml><?xml version="1.0" encoding="utf-8"?>
+<?mso-contentType ?>
+<FormTemplates xmlns="http://schemas.microsoft.com/sharepoint/v3/contenttype/forms">
+  <Display>DocumentLibraryForm</Display>
+  <Edit>DocumentLibraryForm</Edit>
+  <New>DocumentLibraryForm</New>
+</FormTemplates>
+</file>
+
+<file path=customXml/item3.xml><?xml version="1.0" encoding="utf-8"?>
+<p:properties xmlns:p="http://schemas.microsoft.com/office/2006/metadata/properties" xmlns:xsi="http://www.w3.org/2001/XMLSchema-instance" xmlns:pc="http://schemas.microsoft.com/office/infopath/2007/PartnerControls">
+  <documentManagement/>
+</p:properties>
+</file>
+
 <file path=customXml/itemProps1.xml><?xml version="1.0" encoding="utf-8"?>
-<ds:datastoreItem xmlns:ds="http://schemas.openxmlformats.org/officeDocument/2006/customXml" ds:itemID="{4A62A602-78C1-468C-BB25-57CD481DB741}">
+<ds:datastoreItem xmlns:ds="http://schemas.openxmlformats.org/officeDocument/2006/customXml" ds:itemID="{491DF113-39A2-46D5-BFDA-E63300A9ECAB}">
   <ds:schemaRefs>
+    <ds:schemaRef ds:uri="http://schemas.microsoft.com/office/2006/metadata/contentType"/>
+    <ds:schemaRef ds:uri="http://schemas.microsoft.com/office/2006/metadata/properties/metaAttributes"/>
+    <ds:schemaRef ds:uri="http://www.w3.org/2001/XMLSchema"/>
+    <ds:schemaRef ds:uri="http://schemas.microsoft.com/office/2006/metadata/properties"/>
+    <ds:schemaRef ds:uri="http://schemas.openxmlformats.org/package/2006/metadata/core-properties"/>
+    <ds:schemaRef ds:uri="http://purl.org/dc/elements/1.1/"/>
     <ds:schemaRef ds:uri="http://purl.org/dc/terms/"/>
-    <ds:schemaRef ds:uri="http://www.w3.org/XML/1998/namespace"/>
-    <ds:schemaRef ds:uri="http://purl.org/dc/dcmitype/"/>
-    <ds:schemaRef ds:uri="http://schemas.microsoft.com/office/2006/documentManagement/types"/>
-    <ds:schemaRef ds:uri="http://schemas.microsoft.com/office/2006/metadata/properties"/>
-    <ds:schemaRef ds:uri="http://purl.org/dc/elements/1.1/"/>
+    <ds:schemaRef ds:uri="http://schemas.microsoft.com/internal/obd"/>
     <ds:schemaRef ds:uri="http://schemas.microsoft.com/office/infopath/2007/PartnerControls"/>
-    <ds:schemaRef ds:uri="http://schemas.openxmlformats.org/package/2006/metadata/core-properties"/>
   </ds:schemaRefs>
 </ds:datastoreItem>
 </file>
@@ -8594,17 +8661,16 @@
 </file>
 
 <file path=customXml/itemProps3.xml><?xml version="1.0" encoding="utf-8"?>
-<ds:datastoreItem xmlns:ds="http://schemas.openxmlformats.org/officeDocument/2006/customXml" ds:itemID="{491DF113-39A2-46D5-BFDA-E63300A9ECAB}">
+<ds:datastoreItem xmlns:ds="http://schemas.openxmlformats.org/officeDocument/2006/customXml" ds:itemID="{4A62A602-78C1-468C-BB25-57CD481DB741}">
   <ds:schemaRefs>
-    <ds:schemaRef ds:uri="http://schemas.microsoft.com/office/2006/metadata/contentType"/>
-    <ds:schemaRef ds:uri="http://schemas.microsoft.com/office/2006/metadata/properties/metaAttributes"/>
-    <ds:schemaRef ds:uri="http://www.w3.org/2001/XMLSchema"/>
+    <ds:schemaRef ds:uri="http://purl.org/dc/terms/"/>
+    <ds:schemaRef ds:uri="http://www.w3.org/XML/1998/namespace"/>
+    <ds:schemaRef ds:uri="http://purl.org/dc/dcmitype/"/>
+    <ds:schemaRef ds:uri="http://schemas.microsoft.com/office/2006/documentManagement/types"/>
     <ds:schemaRef ds:uri="http://schemas.microsoft.com/office/2006/metadata/properties"/>
+    <ds:schemaRef ds:uri="http://purl.org/dc/elements/1.1/"/>
+    <ds:schemaRef ds:uri="http://schemas.microsoft.com/office/infopath/2007/PartnerControls"/>
     <ds:schemaRef ds:uri="http://schemas.openxmlformats.org/package/2006/metadata/core-properties"/>
-    <ds:schemaRef ds:uri="http://purl.org/dc/elements/1.1/"/>
-    <ds:schemaRef ds:uri="http://purl.org/dc/terms/"/>
-    <ds:schemaRef ds:uri="http://schemas.microsoft.com/internal/obd"/>
-    <ds:schemaRef ds:uri="http://schemas.microsoft.com/office/infopath/2007/PartnerControls"/>
   </ds:schemaRefs>
 </ds:datastoreItem>
 </file>